--- a/Grp5_PPT.pptx
+++ b/Grp5_PPT.pptx
@@ -7846,7 +7846,37 @@
                 <a:latin typeface="Times New Roman" panose="02020603050405020304" pitchFamily="18" charset="0"/>
                 <a:cs typeface="Times New Roman" panose="02020603050405020304" pitchFamily="18" charset="0"/>
               </a:rPr>
-              <a:t>Group 6  ·  World Cup GenAI Hackathon  ·  Spring 2026</a:t>
+              <a:t>Group </a:t>
+            </a:r>
+            <a:r>
+              <a:rPr lang="en-US" sz="1200" b="0" i="1">
+                <a:solidFill>
+                  <a:srgbClr val="CCD6E0"/>
+                </a:solidFill>
+                <a:latin typeface="Times New Roman" panose="02020603050405020304" pitchFamily="18" charset="0"/>
+                <a:cs typeface="Times New Roman" panose="02020603050405020304" pitchFamily="18" charset="0"/>
+              </a:rPr>
+              <a:t>5</a:t>
+            </a:r>
+            <a:r>
+              <a:rPr sz="1200" b="0" i="1">
+                <a:solidFill>
+                  <a:srgbClr val="CCD6E0"/>
+                </a:solidFill>
+                <a:latin typeface="Times New Roman" panose="02020603050405020304" pitchFamily="18" charset="0"/>
+                <a:cs typeface="Times New Roman" panose="02020603050405020304" pitchFamily="18" charset="0"/>
+              </a:rPr>
+              <a:t>  </a:t>
+            </a:r>
+            <a:r>
+              <a:rPr sz="1200" b="0" i="1" dirty="0">
+                <a:solidFill>
+                  <a:srgbClr val="CCD6E0"/>
+                </a:solidFill>
+                <a:latin typeface="Times New Roman" panose="02020603050405020304" pitchFamily="18" charset="0"/>
+                <a:cs typeface="Times New Roman" panose="02020603050405020304" pitchFamily="18" charset="0"/>
+              </a:rPr>
+              <a:t>·  World Cup GenAI Hackathon  ·  Spring 2026</a:t>
             </a:r>
           </a:p>
         </p:txBody>
